--- a/TPM_3_Lista_Modelos.pptx
+++ b/TPM_3_Lista_Modelos.pptx
@@ -197,7 +197,7 @@
           <a:p>
             <a:fld id="{CC56EB0B-3736-454C-BDC9-CFE6B03A8AAF}" type="datetimeFigureOut">
               <a:rPr lang="ko-KR" altLang="en-US" smtClean="0"/>
-              <a:t>2026-09-18</a:t>
+              <a:t>2026-10-05</a:t>
             </a:fld>
             <a:endParaRPr lang="ko-KR" altLang="en-US"/>
           </a:p>
@@ -2304,7 +2304,7 @@
               <a:defRPr/>
             </a:pPr>
             <a:r>
-              <a:rPr lang="en-US" altLang="ko-KR" sz="1800" b="1" spc="-30" dirty="0" smtClean="0">
+              <a:rPr lang="en-US" altLang="ko-KR" sz="1800" b="1" spc="-30" dirty="0">
                 <a:solidFill>
                   <a:prstClr val="black"/>
                 </a:solidFill>
@@ -2381,7 +2381,7 @@
               <a:defRPr/>
             </a:pPr>
             <a:r>
-              <a:rPr lang="en-US" altLang="ko-KR" sz="1600" dirty="0" smtClean="0">
+              <a:rPr lang="en-US" altLang="ko-KR" sz="1600" dirty="0">
                 <a:solidFill>
                   <a:schemeClr val="tx1"/>
                 </a:solidFill>
@@ -2808,7 +2808,7 @@
               <a:defRPr/>
             </a:pPr>
             <a:r>
-              <a:rPr kumimoji="1" lang="es-419" altLang="ko-KR" sz="1300" b="1" i="0" u="none" strike="noStrike" kern="1200" cap="none" spc="-50" normalizeH="0" baseline="0" noProof="0" dirty="0" smtClean="0">
+              <a:rPr kumimoji="1" lang="es-419" altLang="ko-KR" sz="1300" b="1" i="0" u="none" strike="noStrike" kern="1200" cap="none" spc="-50" normalizeH="0" baseline="0" noProof="0" dirty="0">
                 <a:ln>
                   <a:noFill/>
                 </a:ln>
@@ -3157,10 +3157,9 @@
               <a:t> </a:t>
             </a:r>
             <a:r>
-              <a:rPr lang="es-419" altLang="ko-KR" sz="1400" b="1" dirty="0" smtClean="0"/>
+              <a:rPr lang="es-419" altLang="ko-KR" sz="1400" b="1" dirty="0"/>
               <a:t>EFFECT:</a:t>
             </a:r>
-            <a:endParaRPr lang="es-419" altLang="ko-KR" sz="1400" b="1" dirty="0"/>
           </a:p>
           <a:p>
             <a:pPr marL="171450" indent="-171450">
@@ -4053,7 +4052,7 @@
         </p:nvGraphicFramePr>
         <p:xfrm>
           <a:off x="8807451" y="560208"/>
-          <a:ext cx="1012827" cy="950688"/>
+          <a:ext cx="1012827" cy="874488"/>
         </p:xfrm>
         <a:graphic>
           <a:graphicData uri="http://schemas.openxmlformats.org/drawingml/2006/table">
@@ -7467,7 +7466,7 @@
               <a:t> </a:t>
             </a:r>
             <a:r>
-              <a:rPr kumimoji="1" lang="es-419" altLang="ko-KR" sz="1300" b="1" i="0" u="none" strike="noStrike" kern="1200" cap="none" spc="0" normalizeH="0" baseline="0" noProof="0" dirty="0" smtClean="0">
+              <a:rPr kumimoji="1" lang="es-419" altLang="ko-KR" sz="1300" b="1" i="0" u="none" strike="noStrike" kern="1200" cap="none" spc="0" normalizeH="0" baseline="0" noProof="0" dirty="0">
                 <a:ln>
                   <a:noFill/>
                 </a:ln>
@@ -7947,30 +7946,6 @@
               </a:rPr>
               <a:t>At changeover this adds time to a step that is already on the critical path of the line.</a:t>
             </a:r>
-            <a:r>
-              <a:rPr lang="en-US" altLang="ko-KR" sz="1100" dirty="0" err="1">
-                <a:solidFill>
-                  <a:prstClr val="black"/>
-                </a:solidFill>
-                <a:latin typeface="LG스마트체 Regular" panose="020B0600000101010101" pitchFamily="50" charset="-127"/>
-                <a:ea typeface="LG스마트체 Regular" panose="020B0600000101010101" pitchFamily="50" charset="-127"/>
-                <a:cs typeface="Arial" panose="020B0604020202020204" pitchFamily="34" charset="0"/>
-                <a:sym typeface="Wingdings" pitchFamily="2" charset="2"/>
-              </a:rPr>
-              <a:t/>
-            </a:r>
-            <a:r>
-              <a:rPr lang="en-US" altLang="ko-KR" sz="1100" dirty="0">
-                <a:solidFill>
-                  <a:prstClr val="black"/>
-                </a:solidFill>
-                <a:latin typeface="LG스마트체 Regular" panose="020B0600000101010101" pitchFamily="50" charset="-127"/>
-                <a:ea typeface="LG스마트체 Regular" panose="020B0600000101010101" pitchFamily="50" charset="-127"/>
-                <a:cs typeface="Arial" panose="020B0604020202020204" pitchFamily="34" charset="0"/>
-                <a:sym typeface="Wingdings" pitchFamily="2" charset="2"/>
-              </a:rPr>
-              <a:t/>
-            </a:r>
           </a:p>
         </p:txBody>
       </p:sp>
@@ -7989,7 +7964,7 @@
         <p:spPr>
           <a:xfrm>
             <a:off x="4250616" y="576400"/>
-            <a:ext cx="4498076" cy="153888"/>
+            <a:ext cx="4498076" cy="384721"/>
           </a:xfrm>
           <a:prstGeom prst="rect">
             <a:avLst/>
@@ -8028,14 +8003,14 @@
               <a:t>18</a:t>
             </a:r>
             <a:r>
-              <a:rPr lang="en-US" altLang="ko-KR" sz="1000" b="1" spc="-29" dirty="0" smtClean="0">
+              <a:rPr lang="en-US" altLang="ko-KR" sz="1000" b="1" spc="-29" dirty="0">
                 <a:latin typeface="Arial Narrow" panose="020B0606020202030204" pitchFamily="34" charset="0"/>
                 <a:ea typeface="LG스마트체 Regular" panose="020B0600000101010101" pitchFamily="50" charset="-127"/>
               </a:rPr>
               <a:t>/09/2026</a:t>
             </a:r>
             <a:r>
-              <a:rPr lang="ko-KR" altLang="en-US" sz="1000" b="1" spc="-29" dirty="0" smtClean="0">
+              <a:rPr lang="ko-KR" altLang="en-US" sz="1000" b="1" spc="-29" dirty="0">
                 <a:latin typeface="Arial Narrow" panose="020B0606020202030204" pitchFamily="34" charset="0"/>
                 <a:ea typeface="LG스마트체 Regular" panose="020B0600000101010101" pitchFamily="50" charset="-127"/>
               </a:rPr>
@@ -8122,12 +8097,23 @@
               <a:t> </a:t>
             </a:r>
             <a:r>
-              <a:rPr lang="en-US" altLang="ko-KR" sz="1000" b="1" spc="-29" dirty="0">
+              <a:rPr lang="en-US" altLang="ko-KR" sz="1000" b="1" spc="-29">
                 <a:latin typeface="Arial Narrow" panose="020B0606020202030204" pitchFamily="34" charset="0"/>
                 <a:ea typeface="LG스마트체 Regular" panose="020B0600000101010101" pitchFamily="50" charset="-127"/>
               </a:rPr>
-              <a:t>Production Engineering</a:t>
+              <a:t>Production </a:t>
             </a:r>
+          </a:p>
+          <a:p>
+            <a:pPr>
+              <a:spcAft>
+                <a:spcPts val="555"/>
+              </a:spcAft>
+            </a:pPr>
+            <a:endParaRPr lang="en-US" altLang="ko-KR" sz="1000" b="1" spc="-29" dirty="0">
+              <a:latin typeface="Arial Narrow" panose="020B0606020202030204" pitchFamily="34" charset="0"/>
+              <a:ea typeface="LG스마트체 Regular" panose="020B0600000101010101" pitchFamily="50" charset="-127"/>
+            </a:endParaRPr>
           </a:p>
         </p:txBody>
       </p:sp>
@@ -8270,10 +8256,10 @@
           </a:lstStyle>
           <a:p>
             <a:r>
-              <a:rPr lang="es-MX" altLang="ko-KR" sz="1400" b="1" dirty="0" smtClean="0"/>
+              <a:rPr lang="es-MX" altLang="ko-KR" sz="1400" b="1" dirty="0"/>
               <a:t>IMPACT:</a:t>
             </a:r>
-            <a:endParaRPr lang="es-419" altLang="ko-KR" sz="1400" b="1" dirty="0" smtClean="0"/>
+            <a:endParaRPr lang="es-419" altLang="ko-KR" sz="1400" b="1" dirty="0"/>
           </a:p>
           <a:p>
             <a:pPr marL="171450" indent="-171450">
@@ -8290,10 +8276,6 @@
             <a:r>
               <a:rPr lang="en-US" altLang="ko-KR" dirty="0"/>
               <a:t>Shorter changeover time.</a:t>
-            </a:r>
-            <a:r>
-              <a:rPr lang="en-US" altLang="ko-KR" dirty="0" smtClean="0"/>
-              <a:t/>
             </a:r>
           </a:p>
           <a:p>
@@ -8314,23 +8296,7 @@
             </a:r>
             <a:r>
               <a:rPr lang="es-MX" altLang="ko-KR" dirty="0"/>
-              <a:t> </a:t>
-            </a:r>
-            <a:r>
-              <a:rPr lang="es-MX" altLang="ko-KR" dirty="0" err="1"/>
-              <a:t/>
-            </a:r>
-            <a:r>
-              <a:rPr lang="es-MX" altLang="ko-KR" dirty="0"/>
-              <a:t> </a:t>
-            </a:r>
-            <a:r>
-              <a:rPr lang="es-MX" altLang="ko-KR" dirty="0" err="1"/>
-              <a:t/>
-            </a:r>
-            <a:r>
-              <a:rPr lang="es-MX" altLang="ko-KR" dirty="0" smtClean="0"/>
-              <a:t/>
+              <a:t>  </a:t>
             </a:r>
           </a:p>
           <a:p>
@@ -8375,13 +8341,6 @@
           </a:bodyPr>
           <a:lstStyle/>
           <a:p>
-            <a:r>
-              <a:rPr lang="en-US" sz="1100" dirty="0">
-                <a:latin typeface="LG스마트체 Regular" panose="020B0600000101010101" pitchFamily="34" charset="-127"/>
-                <a:ea typeface="LG스마트체 Regular" panose="020B0600000101010101" pitchFamily="34" charset="-127"/>
-              </a:rPr>
-              <a:t/>
-            </a:r>
             <a:endParaRPr lang="es-MX" sz="1100" dirty="0">
               <a:latin typeface="LG스마트체 Regular" panose="020B0600000101010101" pitchFamily="34" charset="-127"/>
               <a:ea typeface="LG스마트체 Regular" panose="020B0600000101010101" pitchFamily="34" charset="-127"/>
@@ -8411,13 +8370,6 @@
           </a:bodyPr>
           <a:lstStyle/>
           <a:p>
-            <a:r>
-              <a:rPr lang="en-US" sz="1100" dirty="0">
-                <a:latin typeface="LG스마트체 Regular" panose="020B0600000101010101" pitchFamily="34" charset="-127"/>
-                <a:ea typeface="LG스마트체 Regular" panose="020B0600000101010101" pitchFamily="34" charset="-127"/>
-              </a:rPr>
-              <a:t/>
-            </a:r>
             <a:endParaRPr lang="es-MX" sz="1100" dirty="0">
               <a:latin typeface="LG스마트체 Regular" panose="020B0600000101010101" pitchFamily="34" charset="-127"/>
               <a:ea typeface="LG스마트체 Regular" panose="020B0600000101010101" pitchFamily="34" charset="-127"/>
@@ -9016,4 +8968,10 @@
     </a:ext>
   </a:extLst>
 </a:theme>
+</file>
+
+<file path=docMetadata/LabelInfo.xml><?xml version="1.0" encoding="utf-8"?>
+<clbl:labelList xmlns:clbl="http://schemas.microsoft.com/office/2020/mipLabelMetadata">
+  <clbl:label id="{99b8a968-831d-4cfc-b1f9-4367a1331151}" enabled="1" method="Privileged" siteId="{e6c7989d-a5fe-4b7b-a335-3288406db2fd}" contentBits="3" removed="0"/>
+</clbl:labelList>
 </file>